--- a/Car Rental Analysis.pptx
+++ b/Car Rental Analysis.pptx
@@ -113,13 +113,18 @@
       </a:defRPr>
     </a:lvl9pPr>
   </p:defaultTextStyle>
+  <p:extLst>
+    <p:ext uri="{EFAFB233-063F-42B5-8137-9DF3F51BA10A}">
+      <p15:sldGuideLst xmlns:p15="http://schemas.microsoft.com/office/powerpoint/2012/main"/>
+    </p:ext>
+  </p:extLst>
 </p:presentation>
 </file>
 
 <file path=ppt/revisionInfo.xml><?xml version="1.0" encoding="utf-8"?>
 <p1510:revInfo xmlns:a="http://schemas.openxmlformats.org/drawingml/2006/main" xmlns:r="http://schemas.openxmlformats.org/officeDocument/2006/relationships" xmlns:p1510="http://schemas.microsoft.com/office/powerpoint/2015/10/main">
   <p1510:revLst>
-    <p1510:client id="{B2EB0555-55C6-44C6-899F-EDEE95B94A25}" v="75" dt="2026-03-15T05:53:35.543"/>
+    <p1510:client id="{B2EB0555-55C6-44C6-899F-EDEE95B94A25}" v="77" dt="2026-03-15T07:37:00.626"/>
   </p1510:revLst>
 </p1510:revInfo>
 </file>
@@ -128,13 +133,13 @@
 <pc:chgInfo xmlns:a="http://schemas.openxmlformats.org/drawingml/2006/main" xmlns:r="http://schemas.openxmlformats.org/officeDocument/2006/relationships" xmlns:ac="http://schemas.microsoft.com/office/drawing/2013/main/command" xmlns:pc="http://schemas.microsoft.com/office/powerpoint/2013/main/command">
   <pc:docChgLst>
     <pc:chgData name="Sravan Venigalla" userId="bf20c713a4e25e54" providerId="LiveId" clId="{128347AF-A65E-4D91-A427-38707CC029B9}"/>
-    <pc:docChg chg="undo custSel addSld modSld">
-      <pc:chgData name="Sravan Venigalla" userId="bf20c713a4e25e54" providerId="LiveId" clId="{128347AF-A65E-4D91-A427-38707CC029B9}" dt="2026-03-15T05:56:38.511" v="614" actId="1076"/>
+    <pc:docChg chg="undo custSel addSld delSld modSld">
+      <pc:chgData name="Sravan Venigalla" userId="bf20c713a4e25e54" providerId="LiveId" clId="{128347AF-A65E-4D91-A427-38707CC029B9}" dt="2026-03-15T07:37:00.626" v="624" actId="478"/>
       <pc:docMkLst>
         <pc:docMk/>
       </pc:docMkLst>
       <pc:sldChg chg="addSp delSp modSp mod">
-        <pc:chgData name="Sravan Venigalla" userId="bf20c713a4e25e54" providerId="LiveId" clId="{128347AF-A65E-4D91-A427-38707CC029B9}" dt="2026-03-15T05:54:12.111" v="563" actId="114"/>
+        <pc:chgData name="Sravan Venigalla" userId="bf20c713a4e25e54" providerId="LiveId" clId="{128347AF-A65E-4D91-A427-38707CC029B9}" dt="2026-03-15T07:37:00.626" v="624" actId="478"/>
         <pc:sldMkLst>
           <pc:docMk/>
           <pc:sldMk cId="4004935569" sldId="256"/>
@@ -164,7 +169,7 @@
           </ac:spMkLst>
         </pc:spChg>
         <pc:spChg chg="add mod">
-          <ac:chgData name="Sravan Venigalla" userId="bf20c713a4e25e54" providerId="LiveId" clId="{128347AF-A65E-4D91-A427-38707CC029B9}" dt="2026-03-15T05:54:12.111" v="563" actId="114"/>
+          <ac:chgData name="Sravan Venigalla" userId="bf20c713a4e25e54" providerId="LiveId" clId="{128347AF-A65E-4D91-A427-38707CC029B9}" dt="2026-03-15T07:27:10.023" v="618" actId="14100"/>
           <ac:spMkLst>
             <pc:docMk/>
             <pc:sldMk cId="4004935569" sldId="256"/>
@@ -179,8 +184,8 @@
             <ac:spMk id="6" creationId="{13496264-EA74-CCE2-32A3-693EE28BBE42}"/>
           </ac:spMkLst>
         </pc:spChg>
-        <pc:spChg chg="add">
-          <ac:chgData name="Sravan Venigalla" userId="bf20c713a4e25e54" providerId="LiveId" clId="{128347AF-A65E-4D91-A427-38707CC029B9}" dt="2026-03-15T05:53:35.543" v="535"/>
+        <pc:spChg chg="add del mod">
+          <ac:chgData name="Sravan Venigalla" userId="bf20c713a4e25e54" providerId="LiveId" clId="{128347AF-A65E-4D91-A427-38707CC029B9}" dt="2026-03-15T07:37:00.626" v="624" actId="478"/>
           <ac:spMkLst>
             <pc:docMk/>
             <pc:sldMk cId="4004935569" sldId="256"/>
@@ -299,7 +304,7 @@
         </pc:graphicFrameChg>
       </pc:sldChg>
       <pc:sldChg chg="addSp delSp modSp new mod modClrScheme chgLayout">
-        <pc:chgData name="Sravan Venigalla" userId="bf20c713a4e25e54" providerId="LiveId" clId="{128347AF-A65E-4D91-A427-38707CC029B9}" dt="2026-03-15T05:44:51.959" v="488" actId="1076"/>
+        <pc:chgData name="Sravan Venigalla" userId="bf20c713a4e25e54" providerId="LiveId" clId="{128347AF-A65E-4D91-A427-38707CC029B9}" dt="2026-03-15T07:31:59.858" v="620" actId="313"/>
         <pc:sldMkLst>
           <pc:docMk/>
           <pc:sldMk cId="3097939514" sldId="259"/>
@@ -337,7 +342,7 @@
           </ac:spMkLst>
         </pc:spChg>
         <pc:spChg chg="add mod ord">
-          <ac:chgData name="Sravan Venigalla" userId="bf20c713a4e25e54" providerId="LiveId" clId="{128347AF-A65E-4D91-A427-38707CC029B9}" dt="2026-03-15T05:20:03.071" v="220" actId="27636"/>
+          <ac:chgData name="Sravan Venigalla" userId="bf20c713a4e25e54" providerId="LiveId" clId="{128347AF-A65E-4D91-A427-38707CC029B9}" dt="2026-03-15T07:31:59.858" v="620" actId="313"/>
           <ac:spMkLst>
             <pc:docMk/>
             <pc:sldMk cId="3097939514" sldId="259"/>
@@ -731,6 +736,13 @@
           </ac:spMkLst>
         </pc:spChg>
       </pc:sldChg>
+      <pc:sldChg chg="new del">
+        <pc:chgData name="Sravan Venigalla" userId="bf20c713a4e25e54" providerId="LiveId" clId="{128347AF-A65E-4D91-A427-38707CC029B9}" dt="2026-03-15T07:32:31.263" v="622" actId="2696"/>
+        <pc:sldMkLst>
+          <pc:docMk/>
+          <pc:sldMk cId="2245985435" sldId="266"/>
+        </pc:sldMkLst>
+      </pc:sldChg>
     </pc:docChg>
   </pc:docChgLst>
 </pc:chgInfo>
@@ -821,6 +833,13 @@
               <a:schemeClr val="lt1"/>
             </a:fontRef>
           </p:style>
+          <p:txBody>
+            <a:bodyPr/>
+            <a:lstStyle/>
+            <a:p>
+              <a:endParaRPr lang="en-IN"/>
+            </a:p>
+          </p:txBody>
         </p:sp>
         <p:sp>
           <p:nvSpPr>
@@ -885,6 +904,13 @@
               <a:noFill/>
             </a:ln>
           </p:spPr>
+          <p:txBody>
+            <a:bodyPr/>
+            <a:lstStyle/>
+            <a:p>
+              <a:endParaRPr lang="en-IN"/>
+            </a:p>
+          </p:txBody>
         </p:sp>
       </p:grpSp>
       <p:sp>
@@ -1146,6 +1172,13 @@
             <a:schemeClr val="lt1"/>
           </a:fontRef>
         </p:style>
+        <p:txBody>
+          <a:bodyPr/>
+          <a:lstStyle/>
+          <a:p>
+            <a:endParaRPr lang="en-IN"/>
+          </a:p>
+        </p:txBody>
       </p:sp>
       <p:sp>
         <p:nvSpPr>
@@ -4455,6 +4488,13 @@
               <a:schemeClr val="lt1"/>
             </a:fontRef>
           </p:style>
+          <p:txBody>
+            <a:bodyPr/>
+            <a:lstStyle/>
+            <a:p>
+              <a:endParaRPr lang="en-IN"/>
+            </a:p>
+          </p:txBody>
         </p:sp>
         <p:sp>
           <p:nvSpPr>
@@ -4512,6 +4552,13 @@
               <a:schemeClr val="lt1"/>
             </a:fontRef>
           </p:style>
+          <p:txBody>
+            <a:bodyPr/>
+            <a:lstStyle/>
+            <a:p>
+              <a:endParaRPr lang="en-IN"/>
+            </a:p>
+          </p:txBody>
         </p:sp>
         <p:sp>
           <p:nvSpPr>
@@ -4569,6 +4616,13 @@
               <a:schemeClr val="lt1"/>
             </a:fontRef>
           </p:style>
+          <p:txBody>
+            <a:bodyPr/>
+            <a:lstStyle/>
+            <a:p>
+              <a:endParaRPr lang="en-IN"/>
+            </a:p>
+          </p:txBody>
         </p:sp>
         <p:sp>
           <p:nvSpPr>
@@ -4626,6 +4680,13 @@
               <a:schemeClr val="lt1"/>
             </a:fontRef>
           </p:style>
+          <p:txBody>
+            <a:bodyPr/>
+            <a:lstStyle/>
+            <a:p>
+              <a:endParaRPr lang="en-IN"/>
+            </a:p>
+          </p:txBody>
         </p:sp>
         <p:sp>
           <p:nvSpPr>
@@ -4683,6 +4744,13 @@
               <a:schemeClr val="lt1"/>
             </a:fontRef>
           </p:style>
+          <p:txBody>
+            <a:bodyPr/>
+            <a:lstStyle/>
+            <a:p>
+              <a:endParaRPr lang="en-IN"/>
+            </a:p>
+          </p:txBody>
         </p:sp>
         <p:sp>
           <p:nvSpPr>
@@ -4740,6 +4808,13 @@
               <a:schemeClr val="lt1"/>
             </a:fontRef>
           </p:style>
+          <p:txBody>
+            <a:bodyPr/>
+            <a:lstStyle/>
+            <a:p>
+              <a:endParaRPr lang="en-IN"/>
+            </a:p>
+          </p:txBody>
         </p:sp>
         <p:sp>
           <p:nvSpPr>
@@ -4887,6 +4962,13 @@
               <a:noFill/>
             </a:ln>
           </p:spPr>
+          <p:txBody>
+            <a:bodyPr/>
+            <a:lstStyle/>
+            <a:p>
+              <a:endParaRPr lang="en-IN"/>
+            </a:p>
+          </p:txBody>
         </p:sp>
         <p:sp>
           <p:nvSpPr>
@@ -5071,6 +5153,13 @@
               <a:noFill/>
             </a:ln>
           </p:spPr>
+          <p:txBody>
+            <a:bodyPr/>
+            <a:lstStyle/>
+            <a:p>
+              <a:endParaRPr lang="en-IN"/>
+            </a:p>
+          </p:txBody>
         </p:sp>
         <p:sp>
           <p:nvSpPr>
@@ -5135,6 +5224,13 @@
               <a:noFill/>
             </a:ln>
           </p:spPr>
+          <p:txBody>
+            <a:bodyPr/>
+            <a:lstStyle/>
+            <a:p>
+              <a:endParaRPr lang="en-IN"/>
+            </a:p>
+          </p:txBody>
         </p:sp>
       </p:grpSp>
       <p:sp>
@@ -5366,6 +5462,13 @@
             <a:schemeClr val="lt1"/>
           </a:fontRef>
         </p:style>
+        <p:txBody>
+          <a:bodyPr/>
+          <a:lstStyle/>
+          <a:p>
+            <a:endParaRPr lang="en-IN"/>
+          </a:p>
+        </p:txBody>
       </p:sp>
       <p:sp>
         <p:nvSpPr>
@@ -10320,6 +10423,13 @@
               <a:schemeClr val="lt1"/>
             </a:fontRef>
           </p:style>
+          <p:txBody>
+            <a:bodyPr/>
+            <a:lstStyle/>
+            <a:p>
+              <a:endParaRPr lang="en-IN"/>
+            </a:p>
+          </p:txBody>
         </p:sp>
         <p:sp>
           <p:nvSpPr>
@@ -10377,6 +10487,13 @@
               <a:schemeClr val="lt1"/>
             </a:fontRef>
           </p:style>
+          <p:txBody>
+            <a:bodyPr/>
+            <a:lstStyle/>
+            <a:p>
+              <a:endParaRPr lang="en-IN"/>
+            </a:p>
+          </p:txBody>
         </p:sp>
         <p:sp>
           <p:nvSpPr>
@@ -10434,6 +10551,13 @@
               <a:schemeClr val="lt1"/>
             </a:fontRef>
           </p:style>
+          <p:txBody>
+            <a:bodyPr/>
+            <a:lstStyle/>
+            <a:p>
+              <a:endParaRPr lang="en-IN"/>
+            </a:p>
+          </p:txBody>
         </p:sp>
         <p:sp>
           <p:nvSpPr>
@@ -10491,6 +10615,13 @@
               <a:schemeClr val="lt1"/>
             </a:fontRef>
           </p:style>
+          <p:txBody>
+            <a:bodyPr/>
+            <a:lstStyle/>
+            <a:p>
+              <a:endParaRPr lang="en-IN"/>
+            </a:p>
+          </p:txBody>
         </p:sp>
         <p:sp>
           <p:nvSpPr>
@@ -10548,6 +10679,13 @@
               <a:schemeClr val="lt1"/>
             </a:fontRef>
           </p:style>
+          <p:txBody>
+            <a:bodyPr/>
+            <a:lstStyle/>
+            <a:p>
+              <a:endParaRPr lang="en-IN"/>
+            </a:p>
+          </p:txBody>
         </p:sp>
         <p:sp>
           <p:nvSpPr>
@@ -10605,6 +10743,13 @@
               <a:schemeClr val="lt1"/>
             </a:fontRef>
           </p:style>
+          <p:txBody>
+            <a:bodyPr/>
+            <a:lstStyle/>
+            <a:p>
+              <a:endParaRPr lang="en-IN"/>
+            </a:p>
+          </p:txBody>
         </p:sp>
         <p:sp>
           <p:nvSpPr>
@@ -10642,6 +10787,13 @@
               <a:schemeClr val="lt1"/>
             </a:fontRef>
           </p:style>
+          <p:txBody>
+            <a:bodyPr/>
+            <a:lstStyle/>
+            <a:p>
+              <a:endParaRPr lang="en-IN"/>
+            </a:p>
+          </p:txBody>
         </p:sp>
         <p:sp>
           <p:nvSpPr>
@@ -10789,6 +10941,13 @@
               <a:noFill/>
             </a:ln>
           </p:spPr>
+          <p:txBody>
+            <a:bodyPr/>
+            <a:lstStyle/>
+            <a:p>
+              <a:endParaRPr lang="en-IN"/>
+            </a:p>
+          </p:txBody>
         </p:sp>
         <p:sp>
           <p:nvSpPr>
@@ -10973,6 +11132,13 @@
               <a:noFill/>
             </a:ln>
           </p:spPr>
+          <p:txBody>
+            <a:bodyPr/>
+            <a:lstStyle/>
+            <a:p>
+              <a:endParaRPr lang="en-IN"/>
+            </a:p>
+          </p:txBody>
         </p:sp>
         <p:sp>
           <p:nvSpPr>
@@ -11037,6 +11203,13 @@
               <a:noFill/>
             </a:ln>
           </p:spPr>
+          <p:txBody>
+            <a:bodyPr/>
+            <a:lstStyle/>
+            <a:p>
+              <a:endParaRPr lang="en-IN"/>
+            </a:p>
+          </p:txBody>
         </p:sp>
       </p:grpSp>
       <p:sp>
@@ -11279,6 +11452,13 @@
             <a:schemeClr val="lt1"/>
           </a:fontRef>
         </p:style>
+        <p:txBody>
+          <a:bodyPr/>
+          <a:lstStyle/>
+          <a:p>
+            <a:endParaRPr lang="en-IN"/>
+          </a:p>
+        </p:txBody>
       </p:sp>
       <p:sp>
         <p:nvSpPr>
@@ -11401,6 +11581,13 @@
               <a:schemeClr val="lt1"/>
             </a:fontRef>
           </p:style>
+          <p:txBody>
+            <a:bodyPr/>
+            <a:lstStyle/>
+            <a:p>
+              <a:endParaRPr lang="en-IN"/>
+            </a:p>
+          </p:txBody>
         </p:sp>
         <p:sp>
           <p:nvSpPr>
@@ -11458,6 +11645,13 @@
               <a:schemeClr val="lt1"/>
             </a:fontRef>
           </p:style>
+          <p:txBody>
+            <a:bodyPr/>
+            <a:lstStyle/>
+            <a:p>
+              <a:endParaRPr lang="en-IN"/>
+            </a:p>
+          </p:txBody>
         </p:sp>
         <p:sp>
           <p:nvSpPr>
@@ -11515,6 +11709,13 @@
               <a:schemeClr val="lt1"/>
             </a:fontRef>
           </p:style>
+          <p:txBody>
+            <a:bodyPr/>
+            <a:lstStyle/>
+            <a:p>
+              <a:endParaRPr lang="en-IN"/>
+            </a:p>
+          </p:txBody>
         </p:sp>
         <p:sp>
           <p:nvSpPr>
@@ -11572,6 +11773,13 @@
               <a:schemeClr val="lt1"/>
             </a:fontRef>
           </p:style>
+          <p:txBody>
+            <a:bodyPr/>
+            <a:lstStyle/>
+            <a:p>
+              <a:endParaRPr lang="en-IN"/>
+            </a:p>
+          </p:txBody>
         </p:sp>
         <p:sp>
           <p:nvSpPr>
@@ -11629,6 +11837,13 @@
               <a:schemeClr val="lt1"/>
             </a:fontRef>
           </p:style>
+          <p:txBody>
+            <a:bodyPr/>
+            <a:lstStyle/>
+            <a:p>
+              <a:endParaRPr lang="en-IN"/>
+            </a:p>
+          </p:txBody>
         </p:sp>
         <p:sp>
           <p:nvSpPr>
@@ -11686,6 +11901,13 @@
               <a:schemeClr val="lt1"/>
             </a:fontRef>
           </p:style>
+          <p:txBody>
+            <a:bodyPr/>
+            <a:lstStyle/>
+            <a:p>
+              <a:endParaRPr lang="en-IN"/>
+            </a:p>
+          </p:txBody>
         </p:sp>
         <p:sp>
           <p:nvSpPr>
@@ -11723,6 +11945,13 @@
               <a:schemeClr val="lt1"/>
             </a:fontRef>
           </p:style>
+          <p:txBody>
+            <a:bodyPr/>
+            <a:lstStyle/>
+            <a:p>
+              <a:endParaRPr lang="en-IN"/>
+            </a:p>
+          </p:txBody>
         </p:sp>
         <p:sp>
           <p:nvSpPr>
@@ -11870,6 +12099,13 @@
               <a:noFill/>
             </a:ln>
           </p:spPr>
+          <p:txBody>
+            <a:bodyPr/>
+            <a:lstStyle/>
+            <a:p>
+              <a:endParaRPr lang="en-IN"/>
+            </a:p>
+          </p:txBody>
         </p:sp>
         <p:sp>
           <p:nvSpPr>
@@ -12054,6 +12290,13 @@
               <a:noFill/>
             </a:ln>
           </p:spPr>
+          <p:txBody>
+            <a:bodyPr/>
+            <a:lstStyle/>
+            <a:p>
+              <a:endParaRPr lang="en-IN"/>
+            </a:p>
+          </p:txBody>
         </p:sp>
         <p:sp>
           <p:nvSpPr>
@@ -12118,6 +12361,13 @@
               <a:noFill/>
             </a:ln>
           </p:spPr>
+          <p:txBody>
+            <a:bodyPr/>
+            <a:lstStyle/>
+            <a:p>
+              <a:endParaRPr lang="en-IN"/>
+            </a:p>
+          </p:txBody>
         </p:sp>
       </p:grpSp>
       <p:sp>
@@ -12387,6 +12637,13 @@
             <a:schemeClr val="lt1"/>
           </a:fontRef>
         </p:style>
+        <p:txBody>
+          <a:bodyPr/>
+          <a:lstStyle/>
+          <a:p>
+            <a:endParaRPr lang="en-IN"/>
+          </a:p>
+        </p:txBody>
       </p:sp>
       <p:sp>
         <p:nvSpPr>
@@ -12514,6 +12771,13 @@
               <a:schemeClr val="lt1"/>
             </a:fontRef>
           </p:style>
+          <p:txBody>
+            <a:bodyPr/>
+            <a:lstStyle/>
+            <a:p>
+              <a:endParaRPr lang="en-IN"/>
+            </a:p>
+          </p:txBody>
         </p:sp>
         <p:sp>
           <p:nvSpPr>
@@ -12571,6 +12835,13 @@
               <a:schemeClr val="lt1"/>
             </a:fontRef>
           </p:style>
+          <p:txBody>
+            <a:bodyPr/>
+            <a:lstStyle/>
+            <a:p>
+              <a:endParaRPr lang="en-IN"/>
+            </a:p>
+          </p:txBody>
         </p:sp>
         <p:sp>
           <p:nvSpPr>
@@ -12628,6 +12899,13 @@
               <a:schemeClr val="lt1"/>
             </a:fontRef>
           </p:style>
+          <p:txBody>
+            <a:bodyPr/>
+            <a:lstStyle/>
+            <a:p>
+              <a:endParaRPr lang="en-IN"/>
+            </a:p>
+          </p:txBody>
         </p:sp>
         <p:sp>
           <p:nvSpPr>
@@ -12685,6 +12963,13 @@
               <a:schemeClr val="lt1"/>
             </a:fontRef>
           </p:style>
+          <p:txBody>
+            <a:bodyPr/>
+            <a:lstStyle/>
+            <a:p>
+              <a:endParaRPr lang="en-IN"/>
+            </a:p>
+          </p:txBody>
         </p:sp>
         <p:sp>
           <p:nvSpPr>
@@ -12742,6 +13027,13 @@
               <a:schemeClr val="lt1"/>
             </a:fontRef>
           </p:style>
+          <p:txBody>
+            <a:bodyPr/>
+            <a:lstStyle/>
+            <a:p>
+              <a:endParaRPr lang="en-IN"/>
+            </a:p>
+          </p:txBody>
         </p:sp>
         <p:sp>
           <p:nvSpPr>
@@ -12799,6 +13091,13 @@
               <a:schemeClr val="lt1"/>
             </a:fontRef>
           </p:style>
+          <p:txBody>
+            <a:bodyPr/>
+            <a:lstStyle/>
+            <a:p>
+              <a:endParaRPr lang="en-IN"/>
+            </a:p>
+          </p:txBody>
         </p:sp>
         <p:sp>
           <p:nvSpPr>
@@ -12946,6 +13245,13 @@
               <a:noFill/>
             </a:ln>
           </p:spPr>
+          <p:txBody>
+            <a:bodyPr/>
+            <a:lstStyle/>
+            <a:p>
+              <a:endParaRPr lang="en-IN"/>
+            </a:p>
+          </p:txBody>
         </p:sp>
         <p:sp>
           <p:nvSpPr>
@@ -13130,6 +13436,13 @@
               <a:noFill/>
             </a:ln>
           </p:spPr>
+          <p:txBody>
+            <a:bodyPr/>
+            <a:lstStyle/>
+            <a:p>
+              <a:endParaRPr lang="en-IN"/>
+            </a:p>
+          </p:txBody>
         </p:sp>
         <p:sp>
           <p:nvSpPr>
@@ -13194,6 +13507,13 @@
               <a:noFill/>
             </a:ln>
           </p:spPr>
+          <p:txBody>
+            <a:bodyPr/>
+            <a:lstStyle/>
+            <a:p>
+              <a:endParaRPr lang="en-IN"/>
+            </a:p>
+          </p:txBody>
         </p:sp>
       </p:grpSp>
       <p:sp>
@@ -13400,6 +13720,13 @@
             <a:schemeClr val="lt1"/>
           </a:fontRef>
         </p:style>
+        <p:txBody>
+          <a:bodyPr/>
+          <a:lstStyle/>
+          <a:p>
+            <a:endParaRPr lang="en-IN"/>
+          </a:p>
+        </p:txBody>
       </p:sp>
       <p:sp>
         <p:nvSpPr>
@@ -14214,8 +14541,8 @@
         </p:nvSpPr>
         <p:spPr>
           <a:xfrm>
-            <a:off x="7991061" y="4770783"/>
-            <a:ext cx="3220278" cy="1200329"/>
+            <a:off x="7354957" y="4770783"/>
+            <a:ext cx="3856382" cy="1015663"/>
           </a:xfrm>
           <a:prstGeom prst="rect">
             <a:avLst/>
@@ -14240,7 +14567,7 @@
               <a:t>Prepared by: </a:t>
             </a:r>
             <a:r>
-              <a:rPr lang="en-IN" sz="3600" b="1" dirty="0" err="1">
+              <a:rPr lang="en-IN" sz="2400" b="1" dirty="0">
                 <a:solidFill>
                   <a:schemeClr val="accent5">
                     <a:lumMod val="20000"/>
@@ -14248,141 +14575,8 @@
                   </a:schemeClr>
                 </a:solidFill>
               </a:rPr>
-              <a:t>Jenifher</a:t>
-            </a:r>
-            <a:endParaRPr lang="en-IN" sz="3600" b="1" dirty="0">
-              <a:solidFill>
-                <a:schemeClr val="accent5">
-                  <a:lumMod val="20000"/>
-                  <a:lumOff val="80000"/>
-                </a:schemeClr>
-              </a:solidFill>
-            </a:endParaRPr>
-          </a:p>
-        </p:txBody>
-      </p:sp>
-      <p:sp>
-        <p:nvSpPr>
-          <p:cNvPr id="7" name="Rectangle 3">
-            <a:extLst>
-              <a:ext uri="{FF2B5EF4-FFF2-40B4-BE49-F238E27FC236}">
-                <a16:creationId xmlns:a16="http://schemas.microsoft.com/office/drawing/2014/main" id="{8A47055D-018F-FD4D-DC1B-FE40D5BB3022}"/>
-              </a:ext>
-            </a:extLst>
-          </p:cNvPr>
-          <p:cNvSpPr>
-            <a:spLocks noChangeArrowheads="1"/>
-          </p:cNvSpPr>
-          <p:nvPr/>
-        </p:nvSpPr>
-        <p:spPr bwMode="auto">
-          <a:xfrm>
-            <a:off x="0" y="0"/>
-            <a:ext cx="12192000" cy="0"/>
-          </a:xfrm>
-          <a:prstGeom prst="rect">
-            <a:avLst/>
-          </a:prstGeom>
-          <a:noFill/>
-          <a:ln>
-            <a:noFill/>
-          </a:ln>
-          <a:effectLst/>
-          <a:extLst>
-            <a:ext uri="{909E8E84-426E-40DD-AFC4-6F175D3DCCD1}">
-              <a14:hiddenFill xmlns:a14="http://schemas.microsoft.com/office/drawing/2010/main">
-                <a:solidFill>
-                  <a:schemeClr val="accent1"/>
-                </a:solidFill>
-              </a14:hiddenFill>
-            </a:ext>
-            <a:ext uri="{91240B29-F687-4F45-9708-019B960494DF}">
-              <a14:hiddenLine xmlns:a14="http://schemas.microsoft.com/office/drawing/2010/main" w="9525">
-                <a:solidFill>
-                  <a:schemeClr val="tx1"/>
-                </a:solidFill>
-                <a:miter lim="800000"/>
-                <a:headEnd/>
-                <a:tailEnd/>
-              </a14:hiddenLine>
-            </a:ext>
-            <a:ext uri="{AF507438-7753-43E0-B8FC-AC1667EBCBE1}">
-              <a14:hiddenEffects xmlns:a14="http://schemas.microsoft.com/office/drawing/2010/main">
-                <a:effectLst>
-                  <a:outerShdw dist="35921" dir="2700000" algn="ctr" rotWithShape="0">
-                    <a:schemeClr val="bg2"/>
-                  </a:outerShdw>
-                </a:effectLst>
-              </a14:hiddenEffects>
-            </a:ext>
-          </a:extLst>
-        </p:spPr>
-        <p:txBody>
-          <a:bodyPr vert="horz" wrap="none" lIns="91440" tIns="45720" rIns="91440" bIns="45720" numCol="1" anchor="ctr" anchorCtr="0" compatLnSpc="1">
-            <a:prstTxWarp prst="textNoShape">
-              <a:avLst/>
-            </a:prstTxWarp>
-            <a:spAutoFit/>
-          </a:bodyPr>
-          <a:lstStyle/>
-          <a:p>
-            <a:pPr marL="0" marR="0" lvl="0" indent="0" algn="l" defTabSz="914400" rtl="0" eaLnBrk="0" fontAlgn="base" latinLnBrk="0" hangingPunct="0">
-              <a:lnSpc>
-                <a:spcPct val="100000"/>
-              </a:lnSpc>
-              <a:spcBef>
-                <a:spcPct val="0"/>
-              </a:spcBef>
-              <a:spcAft>
-                <a:spcPct val="0"/>
-              </a:spcAft>
-              <a:buClrTx/>
-              <a:buSzTx/>
-              <a:buFontTx/>
-              <a:buChar char="•"/>
-              <a:tabLst/>
-            </a:pPr>
-            <a:r>
-              <a:rPr kumimoji="0" lang="en-US" altLang="en-US" sz="1800" b="0" i="0" u="none" strike="noStrike" cap="none" normalizeH="0" baseline="0">
-                <a:ln>
-                  <a:noFill/>
-                </a:ln>
-                <a:solidFill>
-                  <a:schemeClr val="tx1"/>
-                </a:solidFill>
-                <a:effectLst/>
-                <a:latin typeface="Arial" panose="020B0604020202020204" pitchFamily="34" charset="0"/>
-              </a:rPr>
-              <a:t>SQL → Data querying</a:t>
-            </a:r>
-          </a:p>
-          <a:p>
-            <a:pPr marL="0" marR="0" lvl="0" indent="0" algn="l" defTabSz="914400" rtl="0" eaLnBrk="0" fontAlgn="base" latinLnBrk="0" hangingPunct="0">
-              <a:lnSpc>
-                <a:spcPct val="100000"/>
-              </a:lnSpc>
-              <a:spcBef>
-                <a:spcPct val="0"/>
-              </a:spcBef>
-              <a:spcAft>
-                <a:spcPct val="0"/>
-              </a:spcAft>
-              <a:buClrTx/>
-              <a:buSzTx/>
-              <a:buFontTx/>
-              <a:buChar char="•"/>
-              <a:tabLst/>
-            </a:pPr>
-            <a:endParaRPr kumimoji="0" lang="en-US" altLang="en-US" sz="1800" b="0" i="0" u="none" strike="noStrike" cap="none" normalizeH="0" baseline="0">
-              <a:ln>
-                <a:noFill/>
-              </a:ln>
-              <a:solidFill>
-                <a:schemeClr val="tx1"/>
-              </a:solidFill>
-              <a:effectLst/>
-              <a:latin typeface="Arial" panose="020B0604020202020204" pitchFamily="34" charset="0"/>
-            </a:endParaRPr>
+              <a:t>Jenifer Henry Dominique</a:t>
+            </a:r>
           </a:p>
         </p:txBody>
       </p:sp>
@@ -15574,15 +15768,7 @@
             </a:pPr>
             <a:r>
               <a:rPr lang="en-IN" b="1" dirty="0"/>
-              <a:t>2️⃣ Battery </a:t>
-            </a:r>
-            <a:r>
-              <a:rPr lang="en-IN" b="1" dirty="0" err="1"/>
-              <a:t>Behavior</a:t>
-            </a:r>
-            <a:r>
-              <a:rPr lang="en-IN" b="1" dirty="0"/>
-              <a:t> Analysis</a:t>
+              <a:t>2️⃣ Battery Behaviour Analysis</a:t>
             </a:r>
             <a:endParaRPr lang="en-IN" dirty="0"/>
           </a:p>
@@ -15610,12 +15796,8 @@
           </a:p>
           <a:p>
             <a:r>
-              <a:rPr lang="en-IN" dirty="0" err="1"/>
-              <a:t>Analyze</a:t>
-            </a:r>
-            <a:r>
               <a:rPr lang="en-IN" dirty="0"/>
-              <a:t> charging events</a:t>
+              <a:t>Analyse charging events</a:t>
             </a:r>
           </a:p>
           <a:p>
